--- a/Bikes_Sales_Forecast_Presentation.pptx
+++ b/Bikes_Sales_Forecast_Presentation.pptx
@@ -141,7 +141,7 @@
                 </a:solidFill>
                 <a:latin typeface="Arial"/>
               </a:rPr>
-              <a:t>Error Metrics by Model</a:t>
+              <a:t>AutoARIMA vs. Naive Baseline (MASE, lower is better)</a:t>
             </a:r>
           </a:p>
         </c:rich>
@@ -178,7 +178,7 @@
           </c:spPr>
           <c:invertIfNegative val="0"/>
           <c:dLbls>
-            <c:numFmt formatCode="#,##0" sourceLinked="0"/>
+            <c:numFmt formatCode="0.00" sourceLinked="0"/>
             <c:txPr>
               <a:bodyPr/>
               <a:lstStyle/>
@@ -203,15 +203,18 @@
           </c:dLbls>
           <c:cat>
             <c:multiLvlStrRef>
-              <c:f>Sheet1!$A$2:$A$3</c:f>
+              <c:f>Sheet1!$A$2:$A$4</c:f>
               <c:multiLvlStrCache>
-                <c:ptCount val="2"/>
+                <c:ptCount val="3"/>
                 <c:lvl>
                   <c:pt idx="0">
-                    <c:v>MAPE / MAE</c:v>
+                    <c:v>category_1</c:v>
                   </c:pt>
                   <c:pt idx="1">
-                    <c:v>MSPE / MSE</c:v>
+                    <c:v>category_2</c:v>
+                  </c:pt>
+                  <c:pt idx="2">
+                    <c:v>bikeshop_name</c:v>
                   </c:pt>
                 </c:lvl>
               </c:multiLvlStrCache>
@@ -219,15 +222,18 @@
           </c:cat>
           <c:val>
             <c:numRef>
-              <c:f>Sheet1!$B$2:$B$3</c:f>
+              <c:f>Sheet1!$B$2:$B$4</c:f>
               <c:numCache>
                 <c:formatCode>General</c:formatCode>
-                <c:ptCount val="2"/>
+                <c:ptCount val="3"/>
                 <c:pt idx="0">
-                  <c:v>0.2458</c:v>
+                  <c:v>0.452</c:v>
                 </c:pt>
                 <c:pt idx="1">
-                  <c:v>0.0902</c:v>
+                  <c:v>0.5705</c:v>
+                </c:pt>
+                <c:pt idx="2">
+                  <c:v>0.7855</c:v>
                 </c:pt>
               </c:numCache>
             </c:numRef>
@@ -242,7 +248,7 @@
               <c:strCache>
                 <c:ptCount val="1"/>
                 <c:pt idx="0">
-                  <c:v>LSTM</c:v>
+                  <c:v>Naive Baseline</c:v>
                 </c:pt>
               </c:strCache>
             </c:strRef>
@@ -255,7 +261,7 @@
           </c:spPr>
           <c:invertIfNegative val="0"/>
           <c:dLbls>
-            <c:numFmt formatCode="#,##0" sourceLinked="0"/>
+            <c:numFmt formatCode="0.00" sourceLinked="0"/>
             <c:txPr>
               <a:bodyPr/>
               <a:lstStyle/>
@@ -280,15 +286,18 @@
           </c:dLbls>
           <c:cat>
             <c:multiLvlStrRef>
-              <c:f>Sheet1!$A$2:$A$3</c:f>
+              <c:f>Sheet1!$A$2:$A$4</c:f>
               <c:multiLvlStrCache>
-                <c:ptCount val="2"/>
+                <c:ptCount val="3"/>
                 <c:lvl>
                   <c:pt idx="0">
-                    <c:v>MAPE / MAE</c:v>
+                    <c:v>category_1</c:v>
                   </c:pt>
                   <c:pt idx="1">
-                    <c:v>MSPE / MSE</c:v>
+                    <c:v>category_2</c:v>
+                  </c:pt>
+                  <c:pt idx="2">
+                    <c:v>bikeshop_name</c:v>
                   </c:pt>
                 </c:lvl>
               </c:multiLvlStrCache>
@@ -296,22 +305,25 @@
           </c:cat>
           <c:val>
             <c:numRef>
-              <c:f>Sheet1!$C$2:$C$3</c:f>
+              <c:f>Sheet1!$C$2:$C$4</c:f>
               <c:numCache>
                 <c:formatCode>General</c:formatCode>
-                <c:ptCount val="2"/>
+                <c:ptCount val="3"/>
                 <c:pt idx="0">
-                  <c:v>0.236</c:v>
+                  <c:v>1.0</c:v>
                 </c:pt>
                 <c:pt idx="1">
-                  <c:v>0.0904</c:v>
+                  <c:v>1.0</c:v>
+                </c:pt>
+                <c:pt idx="2">
+                  <c:v>1.0</c:v>
                 </c:pt>
               </c:numCache>
             </c:numRef>
           </c:val>
         </c:ser>
         <c:dLbls>
-          <c:numFmt formatCode="#,##0" sourceLinked="0"/>
+          <c:numFmt formatCode="0.00" sourceLinked="0"/>
           <c:txPr>
             <a:bodyPr/>
             <a:lstStyle/>
@@ -1971,6 +1983,10 @@
             <a:prstDash val="solid"/>
           </a:ln>
         </p:spPr>
+        <p:txBody>
+          <a:bodyPr/>
+          <a:p/>
+        </p:txBody>
       </p:sp>
       <p:sp>
         <p:nvSpPr>
@@ -1996,6 +2012,10 @@
             <a:prstDash val="solid"/>
           </a:ln>
         </p:spPr>
+        <p:txBody>
+          <a:bodyPr/>
+          <a:p/>
+        </p:txBody>
       </p:sp>
       <p:sp>
         <p:nvSpPr>
@@ -2021,6 +2041,10 @@
             <a:prstDash val="solid"/>
           </a:ln>
         </p:spPr>
+        <p:txBody>
+          <a:bodyPr/>
+          <a:p/>
+        </p:txBody>
       </p:sp>
       <p:sp>
         <p:nvSpPr>
@@ -2094,7 +2118,7 @@
                 <a:ea typeface="Calibri" pitchFamily="34" charset="-122"/>
                 <a:cs typeface="Calibri" pitchFamily="34" charset="-120"/>
               </a:rPr>
-              <a:t>Sales Performance Analysis &amp; Q4 2024 Forecast</a:t>
+              <a:t>Sales Performance Analysis &amp; Q1 2025 Forecast</a:t>
             </a:r>
             <a:endParaRPr lang="en-US" sz="2000" dirty="0"/>
           </a:p>
@@ -2122,6 +2146,10 @@
             <a:prstDash val="solid"/>
           </a:ln>
         </p:spPr>
+        <p:txBody>
+          <a:bodyPr/>
+          <a:p/>
+        </p:txBody>
       </p:sp>
       <p:sp>
         <p:nvSpPr>
@@ -2170,7 +2198,7 @@
                 <a:ea typeface="Calibri" pitchFamily="34" charset="-122"/>
                 <a:cs typeface="Calibri" pitchFamily="34" charset="-120"/>
               </a:rPr>
-              <a:t>  |  Ella Ndalla  |  March 2026</a:t>
+              <a:t>  |  Ella Ndalla  |  June 2026</a:t>
             </a:r>
             <a:endParaRPr lang="en-US" sz="1300" dirty="0"/>
           </a:p>
@@ -2200,6 +2228,10 @@
             <a:prstDash val="solid"/>
           </a:ln>
         </p:spPr>
+        <p:txBody>
+          <a:bodyPr/>
+          <a:p/>
+        </p:txBody>
       </p:sp>
       <p:sp>
         <p:nvSpPr>
@@ -2264,6 +2296,10 @@
             <a:prstDash val="solid"/>
           </a:ln>
         </p:spPr>
+        <p:txBody>
+          <a:bodyPr/>
+          <a:p/>
+        </p:txBody>
       </p:sp>
       <p:sp>
         <p:nvSpPr>
@@ -2328,6 +2364,10 @@
             <a:prstDash val="solid"/>
           </a:ln>
         </p:spPr>
+        <p:txBody>
+          <a:bodyPr/>
+          <a:p/>
+        </p:txBody>
       </p:sp>
       <p:sp>
         <p:nvSpPr>
@@ -2392,6 +2432,10 @@
             <a:prstDash val="solid"/>
           </a:ln>
         </p:spPr>
+        <p:txBody>
+          <a:bodyPr/>
+          <a:p/>
+        </p:txBody>
       </p:sp>
       <p:sp>
         <p:nvSpPr>
@@ -2456,6 +2500,10 @@
             <a:prstDash val="solid"/>
           </a:ln>
         </p:spPr>
+        <p:txBody>
+          <a:bodyPr/>
+          <a:p/>
+        </p:txBody>
       </p:sp>
       <p:sp>
         <p:nvSpPr>
@@ -2490,7 +2538,7 @@
                 <a:ea typeface="Calibri" pitchFamily="34" charset="-122"/>
                 <a:cs typeface="Calibri" pitchFamily="34" charset="-120"/>
               </a:rPr>
-              <a:t>Tableau</a:t>
+              <a:t>Streamlit + Cloud Run</a:t>
             </a:r>
             <a:endParaRPr lang="en-US" sz="1000" dirty="0"/>
           </a:p>
@@ -2552,6 +2600,10 @@
             <a:prstDash val="solid"/>
           </a:ln>
         </p:spPr>
+        <p:txBody>
+          <a:bodyPr/>
+          <a:p/>
+        </p:txBody>
       </p:sp>
       <p:sp>
         <p:nvSpPr>
@@ -2618,6 +2670,10 @@
             </a:outerShdw>
           </a:effectLst>
         </p:spPr>
+        <p:txBody>
+          <a:bodyPr/>
+          <a:p/>
+        </p:txBody>
       </p:sp>
       <p:sp>
         <p:nvSpPr>
@@ -2643,6 +2699,10 @@
             <a:prstDash val="solid"/>
           </a:ln>
         </p:spPr>
+        <p:txBody>
+          <a:bodyPr/>
+          <a:p/>
+        </p:txBody>
       </p:sp>
       <p:sp>
         <p:nvSpPr>
@@ -2745,7 +2805,7 @@
                 <a:ea typeface="Calibri" pitchFamily="34" charset="-122"/>
                 <a:cs typeface="Calibri" pitchFamily="34" charset="-120"/>
               </a:rPr>
-              <a:t>Analyze sales performance for Q1–Q3 2024 and generate accurate Q4 2024 forecasts.
+              <a:t>Analyze full-year 2020–2024 sales performance and generate accurate Q1 2025 revenue forecasts.
 </a:t>
             </a:r>
             <a:pPr algn="l" indent="0" marL="0">
@@ -2837,6 +2897,10 @@
             </a:outerShdw>
           </a:effectLst>
         </p:spPr>
+        <p:txBody>
+          <a:bodyPr/>
+          <a:p/>
+        </p:txBody>
       </p:sp>
       <p:sp>
         <p:nvSpPr>
@@ -2862,6 +2926,10 @@
             <a:prstDash val="solid"/>
           </a:ln>
         </p:spPr>
+        <p:txBody>
+          <a:bodyPr/>
+          <a:p/>
+        </p:txBody>
       </p:sp>
       <p:sp>
         <p:nvSpPr>
@@ -2926,6 +2994,10 @@
             <a:prstDash val="solid"/>
           </a:ln>
         </p:spPr>
+        <p:txBody>
+          <a:bodyPr/>
+          <a:p/>
+        </p:txBody>
       </p:sp>
       <p:sp>
         <p:nvSpPr>
@@ -3029,6 +3101,10 @@
             <a:prstDash val="solid"/>
           </a:ln>
         </p:spPr>
+        <p:txBody>
+          <a:bodyPr/>
+          <a:p/>
+        </p:txBody>
       </p:sp>
       <p:sp>
         <p:nvSpPr>
@@ -3132,6 +3208,10 @@
             <a:prstDash val="solid"/>
           </a:ln>
         </p:spPr>
+        <p:txBody>
+          <a:bodyPr/>
+          <a:p/>
+        </p:txBody>
       </p:sp>
       <p:sp>
         <p:nvSpPr>
@@ -3235,6 +3315,10 @@
             <a:prstDash val="solid"/>
           </a:ln>
         </p:spPr>
+        <p:txBody>
+          <a:bodyPr/>
+          <a:p/>
+        </p:txBody>
       </p:sp>
       <p:sp>
         <p:nvSpPr>
@@ -4890,7 +4974,7 @@
                 <a:ea typeface="Calibri" pitchFamily="34" charset="-122"/>
                 <a:cs typeface="Calibri" pitchFamily="34" charset="-120"/>
               </a:rPr>
-              <a:t>my_pandas_extensions/database.py</a:t>
+              <a:t>database.py</a:t>
             </a:r>
             <a:pPr algn="l" indent="0" marL="0">
               <a:buNone/>
@@ -4966,6 +5050,10 @@
             <a:prstDash val="solid"/>
           </a:ln>
         </p:spPr>
+        <p:txBody>
+          <a:bodyPr/>
+          <a:p/>
+        </p:txBody>
       </p:sp>
       <p:sp>
         <p:nvSpPr>
@@ -5032,6 +5120,10 @@
             </a:outerShdw>
           </a:effectLst>
         </p:spPr>
+        <p:txBody>
+          <a:bodyPr/>
+          <a:p/>
+        </p:txBody>
       </p:sp>
       <p:sp>
         <p:nvSpPr>
@@ -5057,6 +5149,10 @@
             <a:prstDash val="solid"/>
           </a:ln>
         </p:spPr>
+        <p:txBody>
+          <a:bodyPr/>
+          <a:p/>
+        </p:txBody>
       </p:sp>
       <p:sp>
         <p:nvSpPr>
@@ -5199,6 +5295,10 @@
             </a:outerShdw>
           </a:effectLst>
         </p:spPr>
+        <p:txBody>
+          <a:bodyPr/>
+          <a:p/>
+        </p:txBody>
       </p:sp>
       <p:sp>
         <p:nvSpPr>
@@ -5224,6 +5324,10 @@
             <a:prstDash val="solid"/>
           </a:ln>
         </p:spPr>
+        <p:txBody>
+          <a:bodyPr/>
+          <a:p/>
+        </p:txBody>
       </p:sp>
       <p:sp>
         <p:nvSpPr>
@@ -5366,6 +5470,10 @@
             </a:outerShdw>
           </a:effectLst>
         </p:spPr>
+        <p:txBody>
+          <a:bodyPr/>
+          <a:p/>
+        </p:txBody>
       </p:sp>
       <p:sp>
         <p:nvSpPr>
@@ -5391,6 +5499,10 @@
             <a:prstDash val="solid"/>
           </a:ln>
         </p:spPr>
+        <p:txBody>
+          <a:bodyPr/>
+          <a:p/>
+        </p:txBody>
       </p:sp>
       <p:sp>
         <p:nvSpPr>
@@ -5533,6 +5645,10 @@
             </a:outerShdw>
           </a:effectLst>
         </p:spPr>
+        <p:txBody>
+          <a:bodyPr/>
+          <a:p/>
+        </p:txBody>
       </p:sp>
       <p:sp>
         <p:nvSpPr>
@@ -5558,6 +5674,10 @@
             <a:prstDash val="solid"/>
           </a:ln>
         </p:spPr>
+        <p:txBody>
+          <a:bodyPr/>
+          <a:p/>
+        </p:txBody>
       </p:sp>
       <p:sp>
         <p:nvSpPr>
@@ -5668,7 +5788,7 @@
                 <a:ea typeface="Calibri" pitchFamily="34" charset="-122"/>
                 <a:cs typeface="Calibri" pitchFamily="34" charset="-120"/>
               </a:rPr>
-              <a:t>Keras Tuner optimization</a:t>
+              <a:t>Fixed lightweight architecture (LSTM(32) + Dense(30))</a:t>
             </a:r>
             <a:endParaRPr lang="en-US" sz="1100" dirty="0"/>
           </a:p>
@@ -5700,6 +5820,10 @@
             </a:outerShdw>
           </a:effectLst>
         </p:spPr>
+        <p:txBody>
+          <a:bodyPr/>
+          <a:p/>
+        </p:txBody>
       </p:sp>
       <p:sp>
         <p:nvSpPr>
@@ -5725,6 +5849,10 @@
             <a:prstDash val="solid"/>
           </a:ln>
         </p:spPr>
+        <p:txBody>
+          <a:bodyPr/>
+          <a:p/>
+        </p:txBody>
       </p:sp>
       <p:sp>
         <p:nvSpPr>
@@ -5799,7 +5927,7 @@
                 <a:ea typeface="Calibri" pitchFamily="34" charset="-122"/>
                 <a:cs typeface="Calibri" pitchFamily="34" charset="-120"/>
               </a:rPr>
-              <a:t>MAPE &amp; MSPE for AutoARIMA</a:t>
+              <a:t>MASE (primary) — scale-free, baseline-anchored</a:t>
             </a:r>
             <a:endParaRPr lang="en-US" sz="1100" dirty="0"/>
           </a:p>
@@ -5817,7 +5945,7 @@
                 <a:ea typeface="Calibri" pitchFamily="34" charset="-122"/>
                 <a:cs typeface="Calibri" pitchFamily="34" charset="-120"/>
               </a:rPr>
-              <a:t>MAE &amp; MSE for LSTM</a:t>
+              <a:t>MAE &amp; RMSE per model on same holdout window</a:t>
             </a:r>
             <a:endParaRPr lang="en-US" sz="1100" dirty="0"/>
           </a:p>
@@ -5835,7 +5963,7 @@
                 <a:ea typeface="Calibri" pitchFamily="34" charset="-122"/>
                 <a:cs typeface="Calibri" pitchFamily="34" charset="-120"/>
               </a:rPr>
-              <a:t>Cross-model comparison</a:t>
+              <a:t>MAPE excluded — explodes near zero-value actuals</a:t>
             </a:r>
             <a:endParaRPr lang="en-US" sz="1100" dirty="0"/>
           </a:p>
@@ -5867,6 +5995,10 @@
             </a:outerShdw>
           </a:effectLst>
         </p:spPr>
+        <p:txBody>
+          <a:bodyPr/>
+          <a:p/>
+        </p:txBody>
       </p:sp>
       <p:sp>
         <p:nvSpPr>
@@ -5892,6 +6024,10 @@
             <a:prstDash val="solid"/>
           </a:ln>
         </p:spPr>
+        <p:txBody>
+          <a:bodyPr/>
+          <a:p/>
+        </p:txBody>
       </p:sp>
       <p:sp>
         <p:nvSpPr>
@@ -5966,7 +6102,7 @@
                 <a:ea typeface="Calibri" pitchFamily="34" charset="-122"/>
                 <a:cs typeface="Calibri" pitchFamily="34" charset="-120"/>
               </a:rPr>
-              <a:t>Tableau Public dashboard</a:t>
+              <a:t>Streamlit dashboard deployed on Google Cloud Run</a:t>
             </a:r>
             <a:endParaRPr lang="en-US" sz="1100" dirty="0"/>
           </a:p>
@@ -5984,7 +6120,7 @@
                 <a:ea typeface="Calibri" pitchFamily="34" charset="-122"/>
                 <a:cs typeface="Calibri" pitchFamily="34" charset="-120"/>
               </a:rPr>
-              <a:t>Predictions exported to CSV/PKL</a:t>
+              <a:t>Pre-computed predictions committed to 04_outputs/</a:t>
             </a:r>
             <a:endParaRPr lang="en-US" sz="1100" dirty="0"/>
           </a:p>
@@ -6064,6 +6200,10 @@
             <a:prstDash val="solid"/>
           </a:ln>
         </p:spPr>
+        <p:txBody>
+          <a:bodyPr/>
+          <a:p/>
+        </p:txBody>
       </p:sp>
       <p:sp>
         <p:nvSpPr>
@@ -6130,6 +6270,10 @@
             </a:outerShdw>
           </a:effectLst>
         </p:spPr>
+        <p:txBody>
+          <a:bodyPr/>
+          <a:p/>
+        </p:txBody>
       </p:sp>
       <p:sp>
         <p:nvSpPr>
@@ -6155,6 +6299,10 @@
             <a:prstDash val="solid"/>
           </a:ln>
         </p:spPr>
+        <p:txBody>
+          <a:bodyPr/>
+          <a:p/>
+        </p:txBody>
       </p:sp>
       <p:sp>
         <p:nvSpPr>
@@ -6352,6 +6500,10 @@
             <a:prstDash val="solid"/>
           </a:ln>
         </p:spPr>
+        <p:txBody>
+          <a:bodyPr/>
+          <a:p/>
+        </p:txBody>
       </p:sp>
       <p:sp>
         <p:nvSpPr>
@@ -6386,7 +6538,7 @@
                 <a:ea typeface="Calibri" pitchFamily="34" charset="-122"/>
                 <a:cs typeface="Calibri" pitchFamily="34" charset="-120"/>
               </a:rPr>
-              <a:t>MAPE</a:t>
+              <a:t>MASE</a:t>
             </a:r>
             <a:endParaRPr lang="en-US" sz="1600" dirty="0"/>
           </a:p>
@@ -6403,7 +6555,7 @@
                 <a:ea typeface="Calibri" pitchFamily="34" charset="-122"/>
                 <a:cs typeface="Calibri" pitchFamily="34" charset="-120"/>
               </a:rPr>
-              <a:t>0.2458</a:t>
+              <a:t>0.778</a:t>
             </a:r>
             <a:endParaRPr lang="en-US" sz="1600" dirty="0"/>
           </a:p>
@@ -6433,6 +6585,10 @@
             <a:prstDash val="solid"/>
           </a:ln>
         </p:spPr>
+        <p:txBody>
+          <a:bodyPr/>
+          <a:p/>
+        </p:txBody>
       </p:sp>
       <p:sp>
         <p:nvSpPr>
@@ -6467,7 +6623,7 @@
                 <a:ea typeface="Calibri" pitchFamily="34" charset="-122"/>
                 <a:cs typeface="Calibri" pitchFamily="34" charset="-120"/>
               </a:rPr>
-              <a:t>MSPE</a:t>
+              <a:t>MAE</a:t>
             </a:r>
             <a:endParaRPr lang="en-US" sz="1600" dirty="0"/>
           </a:p>
@@ -6484,7 +6640,7 @@
                 <a:ea typeface="Calibri" pitchFamily="34" charset="-122"/>
                 <a:cs typeface="Calibri" pitchFamily="34" charset="-120"/>
               </a:rPr>
-              <a:t>0.0902</a:t>
+              <a:t>$34,688</a:t>
             </a:r>
             <a:endParaRPr lang="en-US" sz="1600" dirty="0"/>
           </a:p>
@@ -6516,6 +6672,10 @@
             </a:outerShdw>
           </a:effectLst>
         </p:spPr>
+        <p:txBody>
+          <a:bodyPr/>
+          <a:p/>
+        </p:txBody>
       </p:sp>
       <p:sp>
         <p:nvSpPr>
@@ -6541,6 +6701,10 @@
             <a:prstDash val="solid"/>
           </a:ln>
         </p:spPr>
+        <p:txBody>
+          <a:bodyPr/>
+          <a:p/>
+        </p:txBody>
       </p:sp>
       <p:sp>
         <p:nvSpPr>
@@ -6654,7 +6818,7 @@
                 <a:ea typeface="Calibri" pitchFamily="34" charset="-122"/>
                 <a:cs typeface="Calibri" pitchFamily="34" charset="-120"/>
               </a:rPr>
-              <a:t>Architecture: 1 LSTM (256 units) + 3 Dense layers (80, 16, 11)</a:t>
+              <a:t>Architecture: Input(3, 30) → LSTM(32) → Dense(30)</a:t>
             </a:r>
             <a:endParaRPr lang="en-US" sz="1200" dirty="0"/>
           </a:p>
@@ -6672,7 +6836,7 @@
                 <a:ea typeface="Calibri" pitchFamily="34" charset="-122"/>
                 <a:cs typeface="Calibri" pitchFamily="34" charset="-120"/>
               </a:rPr>
-              <a:t>889,428 total parameters (296,475 trainable)</a:t>
+              <a:t>9,054 trainable parameters — lightweight, fast convergence</a:t>
             </a:r>
             <a:endParaRPr lang="en-US" sz="1200" dirty="0"/>
           </a:p>
@@ -6690,7 +6854,7 @@
                 <a:ea typeface="Calibri" pitchFamily="34" charset="-122"/>
                 <a:cs typeface="Calibri" pitchFamily="34" charset="-120"/>
               </a:rPr>
-              <a:t>Keras Tuner optimized to minimize validation loss</a:t>
+              <a:t>Early stopping (patience=5); no Keras Tuner — fixed architecture</a:t>
             </a:r>
             <a:endParaRPr lang="en-US" sz="1200" dirty="0"/>
           </a:p>
@@ -6708,7 +6872,7 @@
                 <a:ea typeface="Calibri" pitchFamily="34" charset="-122"/>
                 <a:cs typeface="Calibri" pitchFamily="34" charset="-120"/>
               </a:rPr>
-              <a:t>Scaled &amp; split with TensorFlow Datasets</a:t>
+              <a:t>TF not a runtime dep — predictions pre-computed &amp; committed</a:t>
             </a:r>
             <a:endParaRPr lang="en-US" sz="1200" dirty="0"/>
           </a:p>
@@ -6738,6 +6902,10 @@
             <a:prstDash val="solid"/>
           </a:ln>
         </p:spPr>
+        <p:txBody>
+          <a:bodyPr/>
+          <a:p/>
+        </p:txBody>
       </p:sp>
       <p:sp>
         <p:nvSpPr>
@@ -6772,7 +6940,7 @@
                 <a:ea typeface="Calibri" pitchFamily="34" charset="-122"/>
                 <a:cs typeface="Calibri" pitchFamily="34" charset="-120"/>
               </a:rPr>
-              <a:t>MAE</a:t>
+              <a:t>MASE</a:t>
             </a:r>
             <a:endParaRPr lang="en-US" sz="1600" dirty="0"/>
           </a:p>
@@ -6789,7 +6957,7 @@
                 <a:ea typeface="Calibri" pitchFamily="34" charset="-122"/>
                 <a:cs typeface="Calibri" pitchFamily="34" charset="-120"/>
               </a:rPr>
-              <a:t>0.2360</a:t>
+              <a:t>0.703</a:t>
             </a:r>
             <a:endParaRPr lang="en-US" sz="1600" dirty="0"/>
           </a:p>
@@ -6819,6 +6987,10 @@
             <a:prstDash val="solid"/>
           </a:ln>
         </p:spPr>
+        <p:txBody>
+          <a:bodyPr/>
+          <a:p/>
+        </p:txBody>
       </p:sp>
       <p:sp>
         <p:nvSpPr>
@@ -6853,7 +7025,7 @@
                 <a:ea typeface="Calibri" pitchFamily="34" charset="-122"/>
                 <a:cs typeface="Calibri" pitchFamily="34" charset="-120"/>
               </a:rPr>
-              <a:t>MSE</a:t>
+              <a:t>MAE</a:t>
             </a:r>
             <a:endParaRPr lang="en-US" sz="1600" dirty="0"/>
           </a:p>
@@ -6870,7 +7042,7 @@
                 <a:ea typeface="Calibri" pitchFamily="34" charset="-122"/>
                 <a:cs typeface="Calibri" pitchFamily="34" charset="-120"/>
               </a:rPr>
-              <a:t>0.0904</a:t>
+              <a:t>$31,981</a:t>
             </a:r>
             <a:endParaRPr lang="en-US" sz="1600" dirty="0"/>
           </a:p>
@@ -6932,6 +7104,10 @@
             <a:prstDash val="solid"/>
           </a:ln>
         </p:spPr>
+        <p:txBody>
+          <a:bodyPr/>
+          <a:p/>
+        </p:txBody>
       </p:sp>
       <p:sp>
         <p:nvSpPr>
@@ -6974,17 +7150,454 @@
       </p:sp>
       <p:graphicFrame>
         <p:nvGraphicFramePr>
-          <p:cNvPr id="4" name="Chart 0" descr=""/>
-          <p:cNvGraphicFramePr/>
+          <p:cNvPr id="4" name="Table 0"/>
+          <p:cNvGraphicFramePr>
+            <a:graphicFrameLocks noGrp="1"/>
+          </p:cNvGraphicFramePr>
           <p:nvPr/>
         </p:nvGraphicFramePr>
         <p:xfrm>
-          <a:off x="457200" y="914400"/>
-          <a:ext cx="5029200" cy="3657600"/>
+          <a:off x="457200" y="960000"/>
+          <a:ext cx="5029200" cy="3600000"/>
         </p:xfrm>
-        <a:graphic xmlns:a="http://schemas.openxmlformats.org/drawingml/2006/main">
-          <a:graphicData uri="http://schemas.openxmlformats.org/drawingml/2006/chart">
-            <c:chart xmlns:c="http://schemas.openxmlformats.org/drawingml/2006/chart" r:id="rId1"/>
+        <a:graphic>
+          <a:graphicData uri="http://schemas.openxmlformats.org/drawingml/2006/table">
+            <a:tbl>
+              <a:tblPr firstRow="1" bandRow="0">
+                <a:tableStyleId>{5C22544A-7EE6-4342-B048-85BDC9FD1C3A}</a:tableStyleId>
+              </a:tblPr>
+              <a:tblGrid>
+                <a:gridCol w="1700000"/>
+                <a:gridCol w="1109400"/>
+                <a:gridCol w="1109400"/>
+                <a:gridCol w="1110400"/>
+              </a:tblGrid>
+              <a:tr h="560000">
+                <a:tc>
+                  <a:txBody>
+                    <a:bodyPr/>
+                    <a:lstStyle/>
+                    <a:p>
+                      <a:pPr algn="ctr"/>
+                      <a:r>
+                        <a:rPr lang="en-US" sz="1200" b="1" dirty="0">
+                          <a:solidFill>
+                            <a:srgbClr val="FFFFFF"/>
+                          </a:solidFill>
+                          <a:latin typeface="Calibri"/>
+                        </a:rPr>
+                        <a:t>Model</a:t>
+                      </a:r>
+                    </a:p>
+                  </a:txBody>
+                  <a:tcPr>
+                    <a:solidFill>
+                      <a:srgbClr val="065A82"/>
+                    </a:solidFill>
+                  </a:tcPr>
+                </a:tc>
+                <a:tc>
+                  <a:txBody>
+                    <a:bodyPr/>
+                    <a:lstStyle/>
+                    <a:p>
+                      <a:pPr algn="ctr"/>
+                      <a:r>
+                        <a:rPr lang="en-US" sz="1200" b="1" dirty="0">
+                          <a:solidFill>
+                            <a:srgbClr val="FFFFFF"/>
+                          </a:solidFill>
+                          <a:latin typeface="Calibri"/>
+                        </a:rPr>
+                        <a:t>MAE (avg)</a:t>
+                      </a:r>
+                    </a:p>
+                  </a:txBody>
+                  <a:tcPr>
+                    <a:solidFill>
+                      <a:srgbClr val="065A82"/>
+                    </a:solidFill>
+                  </a:tcPr>
+                </a:tc>
+                <a:tc>
+                  <a:txBody>
+                    <a:bodyPr/>
+                    <a:lstStyle/>
+                    <a:p>
+                      <a:pPr algn="ctr"/>
+                      <a:r>
+                        <a:rPr lang="en-US" sz="1200" b="1" dirty="0">
+                          <a:solidFill>
+                            <a:srgbClr val="FFFFFF"/>
+                          </a:solidFill>
+                          <a:latin typeface="Calibri"/>
+                        </a:rPr>
+                        <a:t>RMSE (avg)</a:t>
+                      </a:r>
+                    </a:p>
+                  </a:txBody>
+                  <a:tcPr>
+                    <a:solidFill>
+                      <a:srgbClr val="065A82"/>
+                    </a:solidFill>
+                  </a:tcPr>
+                </a:tc>
+                <a:tc>
+                  <a:txBody>
+                    <a:bodyPr/>
+                    <a:lstStyle/>
+                    <a:p>
+                      <a:pPr algn="ctr"/>
+                      <a:r>
+                        <a:rPr lang="en-US" sz="1200" b="1" dirty="0">
+                          <a:solidFill>
+                            <a:srgbClr val="FFFFFF"/>
+                          </a:solidFill>
+                          <a:latin typeface="Calibri"/>
+                        </a:rPr>
+                        <a:t>MASE (avg)</a:t>
+                      </a:r>
+                    </a:p>
+                  </a:txBody>
+                  <a:tcPr>
+                    <a:solidFill>
+                      <a:srgbClr val="065A82"/>
+                    </a:solidFill>
+                  </a:tcPr>
+                </a:tc>
+              </a:tr>
+              <a:tr h="860000">
+                <a:tc>
+                  <a:txBody>
+                    <a:bodyPr/>
+                    <a:lstStyle/>
+                    <a:p>
+                      <a:pPr algn="l"/>
+                      <a:r>
+                        <a:rPr lang="en-US" sz="1400" b="1" dirty="0">
+                          <a:solidFill>
+                            <a:srgbClr val="FFFFFF"/>
+                          </a:solidFill>
+                          <a:latin typeface="Calibri"/>
+                        </a:rPr>
+                        <a:t>🏆 LSTM</a:t>
+                      </a:r>
+                    </a:p>
+                  </a:txBody>
+                  <a:tcPr>
+                    <a:solidFill>
+                      <a:srgbClr val="028090"/>
+                    </a:solidFill>
+                  </a:tcPr>
+                </a:tc>
+                <a:tc>
+                  <a:txBody>
+                    <a:bodyPr/>
+                    <a:lstStyle/>
+                    <a:p>
+                      <a:pPr algn="ctr"/>
+                      <a:r>
+                        <a:rPr lang="en-US" sz="1400" b="1" dirty="0">
+                          <a:solidFill>
+                            <a:srgbClr val="FFFFFF"/>
+                          </a:solidFill>
+                          <a:latin typeface="Calibri"/>
+                        </a:rPr>
+                        <a:t>$31,981</a:t>
+                      </a:r>
+                    </a:p>
+                  </a:txBody>
+                  <a:tcPr>
+                    <a:solidFill>
+                      <a:srgbClr val="028090"/>
+                    </a:solidFill>
+                  </a:tcPr>
+                </a:tc>
+                <a:tc>
+                  <a:txBody>
+                    <a:bodyPr/>
+                    <a:lstStyle/>
+                    <a:p>
+                      <a:pPr algn="ctr"/>
+                      <a:r>
+                        <a:rPr lang="en-US" sz="1400" b="1" dirty="0">
+                          <a:solidFill>
+                            <a:srgbClr val="FFFFFF"/>
+                          </a:solidFill>
+                          <a:latin typeface="Calibri"/>
+                        </a:rPr>
+                        <a:t>$38,165</a:t>
+                      </a:r>
+                    </a:p>
+                  </a:txBody>
+                  <a:tcPr>
+                    <a:solidFill>
+                      <a:srgbClr val="028090"/>
+                    </a:solidFill>
+                  </a:tcPr>
+                </a:tc>
+                <a:tc>
+                  <a:txBody>
+                    <a:bodyPr/>
+                    <a:lstStyle/>
+                    <a:p>
+                      <a:pPr algn="ctr"/>
+                      <a:r>
+                        <a:rPr lang="en-US" sz="1400" b="1" dirty="0">
+                          <a:solidFill>
+                            <a:srgbClr val="FFFFFF"/>
+                          </a:solidFill>
+                          <a:latin typeface="Calibri"/>
+                        </a:rPr>
+                        <a:t>0.703 ✓</a:t>
+                      </a:r>
+                    </a:p>
+                  </a:txBody>
+                  <a:tcPr>
+                    <a:solidFill>
+                      <a:srgbClr val="028090"/>
+                    </a:solidFill>
+                  </a:tcPr>
+                </a:tc>
+              </a:tr>
+              <a:tr h="860000">
+                <a:tc>
+                  <a:txBody>
+                    <a:bodyPr/>
+                    <a:lstStyle/>
+                    <a:p>
+                      <a:pPr algn="l"/>
+                      <a:r>
+                        <a:rPr lang="en-US" sz="1400" b="1" dirty="0">
+                          <a:solidFill>
+                            <a:srgbClr val="065A82"/>
+                          </a:solidFill>
+                          <a:latin typeface="Calibri"/>
+                        </a:rPr>
+                        <a:t>AutoARIMA</a:t>
+                      </a:r>
+                    </a:p>
+                  </a:txBody>
+                  <a:tcPr>
+                    <a:solidFill>
+                      <a:srgbClr val="E8F4F8"/>
+                    </a:solidFill>
+                  </a:tcPr>
+                </a:tc>
+                <a:tc>
+                  <a:txBody>
+                    <a:bodyPr/>
+                    <a:lstStyle/>
+                    <a:p>
+                      <a:pPr algn="ctr"/>
+                      <a:r>
+                        <a:rPr lang="en-US" sz="1400" dirty="0">
+                          <a:solidFill>
+                            <a:srgbClr val="1E293B"/>
+                          </a:solidFill>
+                          <a:latin typeface="Calibri"/>
+                        </a:rPr>
+                        <a:t>$34,688</a:t>
+                      </a:r>
+                    </a:p>
+                  </a:txBody>
+                  <a:tcPr>
+                    <a:solidFill>
+                      <a:srgbClr val="E8F4F8"/>
+                    </a:solidFill>
+                  </a:tcPr>
+                </a:tc>
+                <a:tc>
+                  <a:txBody>
+                    <a:bodyPr/>
+                    <a:lstStyle/>
+                    <a:p>
+                      <a:pPr algn="ctr"/>
+                      <a:r>
+                        <a:rPr lang="en-US" sz="1400" dirty="0">
+                          <a:solidFill>
+                            <a:srgbClr val="1E293B"/>
+                          </a:solidFill>
+                          <a:latin typeface="Calibri"/>
+                        </a:rPr>
+                        <a:t>$39,689</a:t>
+                      </a:r>
+                    </a:p>
+                  </a:txBody>
+                  <a:tcPr>
+                    <a:solidFill>
+                      <a:srgbClr val="E8F4F8"/>
+                    </a:solidFill>
+                  </a:tcPr>
+                </a:tc>
+                <a:tc>
+                  <a:txBody>
+                    <a:bodyPr/>
+                    <a:lstStyle/>
+                    <a:p>
+                      <a:pPr algn="ctr"/>
+                      <a:r>
+                        <a:rPr lang="en-US" sz="1400" dirty="0">
+                          <a:solidFill>
+                            <a:srgbClr val="1E293B"/>
+                          </a:solidFill>
+                          <a:latin typeface="Calibri"/>
+                        </a:rPr>
+                        <a:t>0.778 ✓</a:t>
+                      </a:r>
+                    </a:p>
+                  </a:txBody>
+                  <a:tcPr>
+                    <a:solidFill>
+                      <a:srgbClr val="E8F4F8"/>
+                    </a:solidFill>
+                  </a:tcPr>
+                </a:tc>
+              </a:tr>
+              <a:tr h="860000">
+                <a:tc>
+                  <a:txBody>
+                    <a:bodyPr/>
+                    <a:lstStyle/>
+                    <a:p>
+                      <a:pPr algn="l"/>
+                      <a:r>
+                        <a:rPr lang="en-US" sz="1400" dirty="0">
+                          <a:solidFill>
+                            <a:srgbClr val="4A5568"/>
+                          </a:solidFill>
+                          <a:latin typeface="Calibri"/>
+                        </a:rPr>
+                        <a:t>Naïve Baseline</a:t>
+                      </a:r>
+                    </a:p>
+                  </a:txBody>
+                  <a:tcPr>
+                    <a:solidFill>
+                      <a:srgbClr val="F5F5F5"/>
+                    </a:solidFill>
+                  </a:tcPr>
+                </a:tc>
+                <a:tc>
+                  <a:txBody>
+                    <a:bodyPr/>
+                    <a:lstStyle/>
+                    <a:p>
+                      <a:pPr algn="ctr"/>
+                      <a:r>
+                        <a:rPr lang="en-US" sz="1400" dirty="0">
+                          <a:solidFill>
+                            <a:srgbClr val="4A5568"/>
+                          </a:solidFill>
+                          <a:latin typeface="Calibri"/>
+                        </a:rPr>
+                        <a:t>$26,612</a:t>
+                      </a:r>
+                    </a:p>
+                  </a:txBody>
+                  <a:tcPr>
+                    <a:solidFill>
+                      <a:srgbClr val="F5F5F5"/>
+                    </a:solidFill>
+                  </a:tcPr>
+                </a:tc>
+                <a:tc>
+                  <a:txBody>
+                    <a:bodyPr/>
+                    <a:lstStyle/>
+                    <a:p>
+                      <a:pPr algn="ctr"/>
+                      <a:r>
+                        <a:rPr lang="en-US" sz="1400" dirty="0">
+                          <a:solidFill>
+                            <a:srgbClr val="4A5568"/>
+                          </a:solidFill>
+                          <a:latin typeface="Calibri"/>
+                        </a:rPr>
+                        <a:t>$36,551</a:t>
+                      </a:r>
+                    </a:p>
+                  </a:txBody>
+                  <a:tcPr>
+                    <a:solidFill>
+                      <a:srgbClr val="F5F5F5"/>
+                    </a:solidFill>
+                  </a:tcPr>
+                </a:tc>
+                <a:tc>
+                  <a:txBody>
+                    <a:bodyPr/>
+                    <a:lstStyle/>
+                    <a:p>
+                      <a:pPr algn="ctr"/>
+                      <a:r>
+                        <a:rPr lang="en-US" sz="1400" dirty="0">
+                          <a:solidFill>
+                            <a:srgbClr val="4A5568"/>
+                          </a:solidFill>
+                          <a:latin typeface="Calibri"/>
+                        </a:rPr>
+                        <a:t>1.000</a:t>
+                      </a:r>
+                    </a:p>
+                  </a:txBody>
+                  <a:tcPr>
+                    <a:solidFill>
+                      <a:srgbClr val="F5F5F5"/>
+                    </a:solidFill>
+                  </a:tcPr>
+                </a:tc>
+              </a:tr>
+              <a:tr h="460000">
+                <a:tc gridSpan="4">
+                  <a:txBody>
+                    <a:bodyPr/>
+                    <a:lstStyle/>
+                    <a:p>
+                      <a:pPr algn="l"/>
+                      <a:r>
+                        <a:rPr lang="en-US" sz="900" i="1" dirty="0">
+                          <a:solidFill>
+                            <a:srgbClr val="4A5568"/>
+                          </a:solidFill>
+                          <a:latin typeface="Calibri"/>
+                        </a:rPr>
+                        <a:t>MASE &lt; 1 beats naïve baseline. MAPE excluded — near-zero monthly sales cause division-by-zero distortion. Holdout: last 3 months, 30 bikeshops.</a:t>
+                      </a:r>
+                    </a:p>
+                  </a:txBody>
+                  <a:tcPr>
+                    <a:solidFill>
+                      <a:srgbClr val="FFFFFF"/>
+                    </a:solidFill>
+                  </a:tcPr>
+                </a:tc>
+                <a:tc hMerge="1">
+                  <a:txBody>
+                    <a:bodyPr/>
+                    <a:lstStyle/>
+                    <a:p/>
+                  </a:txBody>
+                  <a:tcPr/>
+                </a:tc>
+                <a:tc hMerge="1">
+                  <a:txBody>
+                    <a:bodyPr/>
+                    <a:lstStyle/>
+                    <a:p/>
+                  </a:txBody>
+                  <a:tcPr/>
+                </a:tc>
+                <a:tc hMerge="1">
+                  <a:txBody>
+                    <a:bodyPr/>
+                    <a:lstStyle/>
+                    <a:p/>
+                  </a:txBody>
+                  <a:tcPr/>
+                </a:tc>
+              </a:tr>
+            </a:tbl>
           </a:graphicData>
         </a:graphic>
       </p:graphicFrame>
@@ -7014,6 +7627,10 @@
             </a:outerShdw>
           </a:effectLst>
         </p:spPr>
+        <p:txBody>
+          <a:bodyPr/>
+          <a:p/>
+        </p:txBody>
       </p:sp>
       <p:sp>
         <p:nvSpPr>
@@ -7039,6 +7656,10 @@
             <a:prstDash val="solid"/>
           </a:ln>
         </p:spPr>
+        <p:txBody>
+          <a:bodyPr/>
+          <a:p/>
+        </p:txBody>
       </p:sp>
       <p:sp>
         <p:nvSpPr>
@@ -7073,7 +7694,7 @@
                 <a:ea typeface="Calibri" pitchFamily="34" charset="-122"/>
                 <a:cs typeface="Calibri" pitchFamily="34" charset="-120"/>
               </a:rPr>
-              <a:t>Winner: LSTM</a:t>
+              <a:t>Both Models Beat Naïve — LSTM Wins</a:t>
             </a:r>
             <a:endParaRPr lang="en-US" sz="1600" dirty="0"/>
           </a:p>
@@ -7112,7 +7733,7 @@
                 <a:ea typeface="Calibri" pitchFamily="34" charset="-122"/>
                 <a:cs typeface="Calibri" pitchFamily="34" charset="-120"/>
               </a:rPr>
-              <a:t>LSTM achieves lower MAE (0.236 vs 0.246) and lower MSE (0.0904 vs 0.0902), demonstrating a slight performance edge.</a:t>
+              <a:t>Both AutoARIMA (MASE 0.778) and LSTM (MASE 0.703) beat the naïve baseline on a true 3-month holdout across all 30 bikeshops. LSTM achieves lower MAE ($31,981 vs $34,688) and lower RMSE ($38,165 vs $39,689).</a:t>
             </a:r>
             <a:endParaRPr lang="en-US" sz="1100" dirty="0"/>
           </a:p>
@@ -7144,6 +7765,10 @@
             </a:outerShdw>
           </a:effectLst>
         </p:spPr>
+        <p:txBody>
+          <a:bodyPr/>
+          <a:p/>
+        </p:txBody>
       </p:sp>
       <p:sp>
         <p:nvSpPr>
@@ -7169,6 +7794,10 @@
             <a:prstDash val="solid"/>
           </a:ln>
         </p:spPr>
+        <p:txBody>
+          <a:bodyPr/>
+          <a:p/>
+        </p:txBody>
       </p:sp>
       <p:sp>
         <p:nvSpPr>
@@ -7243,7 +7872,7 @@
                 <a:ea typeface="Calibri" pitchFamily="34" charset="-122"/>
                 <a:cs typeface="Calibri" pitchFamily="34" charset="-120"/>
               </a:rPr>
-              <a:t>AutoARIMA: smoother forecast lines</a:t>
+              <a:t>LSTM: best overall — lower MAE, RMSE, and MASE</a:t>
             </a:r>
             <a:endParaRPr lang="en-US" sz="1100" dirty="0"/>
           </a:p>
@@ -7261,7 +7890,7 @@
                 <a:ea typeface="Calibri" pitchFamily="34" charset="-122"/>
                 <a:cs typeface="Calibri" pitchFamily="34" charset="-120"/>
               </a:rPr>
-              <a:t>LSTM: more conservative estimates</a:t>
+              <a:t>MASE preferred over MAPE — MAPE explodes when actuals are near zero (e.g. bikeshop-level)</a:t>
             </a:r>
             <a:endParaRPr lang="en-US" sz="1100" dirty="0"/>
           </a:p>
@@ -7279,7 +7908,7 @@
                 <a:ea typeface="Calibri" pitchFamily="34" charset="-122"/>
                 <a:cs typeface="Calibri" pitchFamily="34" charset="-120"/>
               </a:rPr>
-              <a:t>Both comparable on small-scale forecasts</a:t>
+              <a:t>Naïve MASE = 1.0 by definition — all models scored against same holdout</a:t>
             </a:r>
             <a:endParaRPr lang="en-US" sz="1100" dirty="0"/>
           </a:p>
@@ -7297,7 +7926,7 @@
                 <a:ea typeface="Calibri" pitchFamily="34" charset="-122"/>
                 <a:cs typeface="Calibri" pitchFamily="34" charset="-120"/>
               </a:rPr>
-              <a:t>LSTM preferred for complex patterns</a:t>
+              <a:t>AutoARIMA advantage: per-series CI bands, no GPU needed, interpretable</a:t>
             </a:r>
             <a:endParaRPr lang="en-US" sz="1100" dirty="0"/>
           </a:p>
@@ -7359,6 +7988,10 @@
             <a:prstDash val="solid"/>
           </a:ln>
         </p:spPr>
+        <p:txBody>
+          <a:bodyPr/>
+          <a:p/>
+        </p:txBody>
       </p:sp>
       <p:sp>
         <p:nvSpPr>
@@ -7423,6 +8056,10 @@
             <a:prstDash val="solid"/>
           </a:ln>
         </p:spPr>
+        <p:txBody>
+          <a:bodyPr/>
+          <a:p/>
+        </p:txBody>
       </p:sp>
       <p:sp>
         <p:nvSpPr>
@@ -7448,6 +8085,10 @@
             <a:prstDash val="solid"/>
           </a:ln>
         </p:spPr>
+        <p:txBody>
+          <a:bodyPr/>
+          <a:p/>
+        </p:txBody>
       </p:sp>
       <p:sp>
         <p:nvSpPr>
@@ -7549,6 +8190,10 @@
             <a:prstDash val="solid"/>
           </a:ln>
         </p:spPr>
+        <p:txBody>
+          <a:bodyPr/>
+          <a:p/>
+        </p:txBody>
       </p:sp>
       <p:sp>
         <p:nvSpPr>
@@ -7613,6 +8258,10 @@
             <a:prstDash val="solid"/>
           </a:ln>
         </p:spPr>
+        <p:txBody>
+          <a:bodyPr/>
+          <a:p/>
+        </p:txBody>
       </p:sp>
       <p:sp>
         <p:nvSpPr>
@@ -7638,6 +8287,10 @@
             <a:prstDash val="solid"/>
           </a:ln>
         </p:spPr>
+        <p:txBody>
+          <a:bodyPr/>
+          <a:p/>
+        </p:txBody>
       </p:sp>
       <p:sp>
         <p:nvSpPr>
@@ -7739,6 +8392,10 @@
             <a:prstDash val="solid"/>
           </a:ln>
         </p:spPr>
+        <p:txBody>
+          <a:bodyPr/>
+          <a:p/>
+        </p:txBody>
       </p:sp>
       <p:sp>
         <p:nvSpPr>
@@ -7803,6 +8460,10 @@
             <a:prstDash val="solid"/>
           </a:ln>
         </p:spPr>
+        <p:txBody>
+          <a:bodyPr/>
+          <a:p/>
+        </p:txBody>
       </p:sp>
       <p:sp>
         <p:nvSpPr>
@@ -7828,6 +8489,10 @@
             <a:prstDash val="solid"/>
           </a:ln>
         </p:spPr>
+        <p:txBody>
+          <a:bodyPr/>
+          <a:p/>
+        </p:txBody>
       </p:sp>
       <p:sp>
         <p:nvSpPr>
@@ -7929,6 +8594,10 @@
             <a:prstDash val="solid"/>
           </a:ln>
         </p:spPr>
+        <p:txBody>
+          <a:bodyPr/>
+          <a:p/>
+        </p:txBody>
       </p:sp>
       <p:sp>
         <p:nvSpPr>
@@ -7963,7 +8632,7 @@
                 <a:ea typeface="Calibri" pitchFamily="34" charset="-122"/>
                 <a:cs typeface="Calibri" pitchFamily="34" charset="-120"/>
               </a:rPr>
-              <a:t>Both models show comparable accuracy on smaller figures. LSTM achieves lower error overall; AutoARIMA produces smoother, more interpretable lines.</a:t>
+              <a:t>Both models beat the naïve baseline. LSTM wins overall (MASE 0.703 vs 0.778). AutoARIMA adds value through per-series 95% CI bands and interpretable trends. MAPE excluded — MASE is the correct metric for sparse bikeshop data.</a:t>
             </a:r>
             <a:endParaRPr lang="en-US" sz="1200" dirty="0"/>
           </a:p>
@@ -8025,6 +8694,10 @@
             <a:prstDash val="solid"/>
           </a:ln>
         </p:spPr>
+        <p:txBody>
+          <a:bodyPr/>
+          <a:p/>
+        </p:txBody>
       </p:sp>
       <p:sp>
         <p:nvSpPr>
@@ -8084,6 +8757,10 @@
           </a:solidFill>
           <a:ln/>
         </p:spPr>
+        <p:txBody>
+          <a:bodyPr/>
+          <a:p/>
+        </p:txBody>
       </p:sp>
       <p:sp>
         <p:nvSpPr>
@@ -8235,7 +8912,7 @@
                 <a:ea typeface="Consolas" pitchFamily="34" charset="-122"/>
                 <a:cs typeface="Consolas" pitchFamily="34" charset="-120"/>
               </a:rPr>
-              <a:t>📁 02_reports/</a:t>
+              <a:t>📁 02_SRC/</a:t>
             </a:r>
             <a:endParaRPr lang="en-US" sz="1100" dirty="0"/>
           </a:p>
@@ -8274,7 +8951,7 @@
                 <a:ea typeface="Calibri" pitchFamily="34" charset="-122"/>
                 <a:cs typeface="Calibri" pitchFamily="34" charset="-120"/>
               </a:rPr>
-              <a:t>EDA profile reports (HTML)</a:t>
+              <a:t>All Python source: database.py, forecasting.py, runners</a:t>
             </a:r>
             <a:endParaRPr lang="en-US" sz="900" dirty="0"/>
           </a:p>
@@ -8313,7 +8990,7 @@
                 <a:ea typeface="Consolas" pitchFamily="34" charset="-122"/>
                 <a:cs typeface="Consolas" pitchFamily="34" charset="-120"/>
               </a:rPr>
-              <a:t>📁 03_SRC/</a:t>
+              <a:t>📄 Bikes_Sales_Forecast_Presentation.pptx</a:t>
             </a:r>
             <a:endParaRPr lang="en-US" sz="1100" dirty="0"/>
           </a:p>
@@ -8352,7 +9029,7 @@
                 <a:ea typeface="Calibri" pitchFamily="34" charset="-122"/>
                 <a:cs typeface="Calibri" pitchFamily="34" charset="-120"/>
               </a:rPr>
-              <a:t>Source code scripts</a:t>
+              <a:t>Project slide deck</a:t>
             </a:r>
             <a:endParaRPr lang="en-US" sz="900" dirty="0"/>
           </a:p>
@@ -8391,7 +9068,7 @@
                 <a:ea typeface="Consolas" pitchFamily="34" charset="-122"/>
                 <a:cs typeface="Consolas" pitchFamily="34" charset="-120"/>
               </a:rPr>
-              <a:t>📁 04_artifacts/</a:t>
+              <a:t>📁 04_outputs/</a:t>
             </a:r>
             <a:endParaRPr lang="en-US" sz="1100" dirty="0"/>
           </a:p>
@@ -8430,7 +9107,7 @@
                 <a:ea typeface="Calibri" pitchFamily="34" charset="-122"/>
                 <a:cs typeface="Calibri" pitchFamily="34" charset="-120"/>
               </a:rPr>
-              <a:t>Trained models &amp; predictions</a:t>
+              <a:t>Trained model (.h5), LSTM predictions (.pkl), comparison CSV</a:t>
             </a:r>
             <a:endParaRPr lang="en-US" sz="900" dirty="0"/>
           </a:p>
@@ -8469,7 +9146,7 @@
                 <a:ea typeface="Consolas" pitchFamily="34" charset="-122"/>
                 <a:cs typeface="Consolas" pitchFamily="34" charset="-120"/>
               </a:rPr>
-              <a:t>📁 05_images/</a:t>
+              <a:t>📁 01_database/</a:t>
             </a:r>
             <a:endParaRPr lang="en-US" sz="1100" dirty="0"/>
           </a:p>
@@ -8508,7 +9185,7 @@
                 <a:ea typeface="Calibri" pitchFamily="34" charset="-122"/>
                 <a:cs typeface="Calibri" pitchFamily="34" charset="-120"/>
               </a:rPr>
-              <a:t>Figures &amp; charts</a:t>
+              <a:t>SQLite database (bike_orders_database.sqlite)</a:t>
             </a:r>
             <a:endParaRPr lang="en-US" sz="900" dirty="0"/>
           </a:p>
@@ -8586,7 +9263,7 @@
                 <a:ea typeface="Calibri" pitchFamily="34" charset="-122"/>
                 <a:cs typeface="Calibri" pitchFamily="34" charset="-120"/>
               </a:rPr>
-              <a:t>Python dependencies</a:t>
+              <a:t>App runtime deps (no TensorFlow)</a:t>
             </a:r>
             <a:endParaRPr lang="en-US" sz="900" dirty="0"/>
           </a:p>
@@ -8696,6 +9373,10 @@
             </a:outerShdw>
           </a:effectLst>
         </p:spPr>
+        <p:txBody>
+          <a:bodyPr/>
+          <a:p/>
+        </p:txBody>
       </p:sp>
       <p:sp>
         <p:nvSpPr>
@@ -8721,6 +9402,10 @@
             <a:prstDash val="solid"/>
           </a:ln>
         </p:spPr>
+        <p:txBody>
+          <a:bodyPr/>
+          <a:p/>
+        </p:txBody>
       </p:sp>
       <p:sp>
         <p:nvSpPr>
@@ -8826,6 +9511,10 @@
             </a:outerShdw>
           </a:effectLst>
         </p:spPr>
+        <p:txBody>
+          <a:bodyPr/>
+          <a:p/>
+        </p:txBody>
       </p:sp>
       <p:sp>
         <p:nvSpPr>
@@ -8851,6 +9540,10 @@
             <a:prstDash val="solid"/>
           </a:ln>
         </p:spPr>
+        <p:txBody>
+          <a:bodyPr/>
+          <a:p/>
+        </p:txBody>
       </p:sp>
       <p:sp>
         <p:nvSpPr>
@@ -8885,7 +9578,7 @@
                 <a:ea typeface="Calibri" pitchFamily="34" charset="-122"/>
                 <a:cs typeface="Calibri" pitchFamily="34" charset="-120"/>
               </a:rPr>
-              <a:t>summarize_by_time.py</a:t>
+              <a:t>forecasting.py</a:t>
             </a:r>
             <a:endParaRPr lang="en-US" sz="1200" dirty="0"/>
           </a:p>
@@ -8924,7 +9617,7 @@
                 <a:ea typeface="Calibri" pitchFamily="34" charset="-122"/>
                 <a:cs typeface="Calibri" pitchFamily="34" charset="-120"/>
               </a:rPr>
-              <a:t>Automates data summarization by group and time period for forecasting prep</a:t>
+              <a:t>Shared modeling/evaluation logic, plus naive-baseline and MASE scoring (compare_arima_lstm)</a:t>
             </a:r>
             <a:endParaRPr lang="en-US" sz="1100" dirty="0"/>
           </a:p>
@@ -8956,6 +9649,10 @@
             </a:outerShdw>
           </a:effectLst>
         </p:spPr>
+        <p:txBody>
+          <a:bodyPr/>
+          <a:p/>
+        </p:txBody>
       </p:sp>
       <p:sp>
         <p:nvSpPr>
@@ -8981,6 +9678,10 @@
             <a:prstDash val="solid"/>
           </a:ln>
         </p:spPr>
+        <p:txBody>
+          <a:bodyPr/>
+          <a:p/>
+        </p:txBody>
       </p:sp>
       <p:sp>
         <p:nvSpPr>
@@ -9054,7 +9755,7 @@
                 <a:ea typeface="Calibri" pitchFamily="34" charset="-122"/>
                 <a:cs typeface="Calibri" pitchFamily="34" charset="-120"/>
               </a:rPr>
-              <a:t>AutoARIMA model, evaluation metrics, and forecast combination utilities</a:t>
+              <a:t>Runs the AutoARIMA pipeline using shared functions imported from forecasting.py</a:t>
             </a:r>
             <a:endParaRPr lang="en-US" sz="1100" dirty="0"/>
           </a:p>
@@ -9086,6 +9787,10 @@
             </a:outerShdw>
           </a:effectLst>
         </p:spPr>
+        <p:txBody>
+          <a:bodyPr/>
+          <a:p/>
+        </p:txBody>
       </p:sp>
       <p:sp>
         <p:nvSpPr>
@@ -9111,6 +9816,10 @@
             <a:prstDash val="solid"/>
           </a:ln>
         </p:spPr>
+        <p:txBody>
+          <a:bodyPr/>
+          <a:p/>
+        </p:txBody>
       </p:sp>
       <p:sp>
         <p:nvSpPr>
@@ -9145,7 +9854,7 @@
                 <a:ea typeface="Calibri" pitchFamily="34" charset="-122"/>
                 <a:cs typeface="Calibri" pitchFamily="34" charset="-120"/>
               </a:rPr>
-              <a:t>Multivariate_forecast.py</a:t>
+              <a:t>Multivariate_forecasting.py</a:t>
             </a:r>
             <a:endParaRPr lang="en-US" sz="1200" dirty="0"/>
           </a:p>
@@ -9184,7 +9893,7 @@
                 <a:ea typeface="Calibri" pitchFamily="34" charset="-122"/>
                 <a:cs typeface="Calibri" pitchFamily="34" charset="-120"/>
               </a:rPr>
-              <a:t>LSTM model training, Keras Tuner optimization, and multivariate predictions</a:t>
+              <a:t>LSTM training, then scores ARIMA/LSTM/naive together via compare_arima_lstm()</a:t>
             </a:r>
             <a:endParaRPr lang="en-US" sz="1100" dirty="0"/>
           </a:p>
@@ -9246,6 +9955,10 @@
             <a:prstDash val="solid"/>
           </a:ln>
         </p:spPr>
+        <p:txBody>
+          <a:bodyPr/>
+          <a:p/>
+        </p:txBody>
       </p:sp>
       <p:sp>
         <p:nvSpPr>
@@ -9308,6 +10021,10 @@
             <a:prstDash val="solid"/>
           </a:ln>
         </p:spPr>
+        <p:txBody>
+          <a:bodyPr/>
+          <a:p/>
+        </p:txBody>
       </p:sp>
       <p:sp>
         <p:nvSpPr>
@@ -9418,7 +10135,7 @@
                 <a:ea typeface="Calibri" pitchFamily="34" charset="-122"/>
                 <a:cs typeface="Calibri" pitchFamily="34" charset="-120"/>
               </a:rPr>
-              <a:t>LSTM outperforms AutoARIMA with lower MAE (0.236 vs 0.246)</a:t>
+              <a:t>LSTM wins (MASE 0.703); AutoARIMA close behind (MASE 0.778) — both beat naïve</a:t>
             </a:r>
             <a:endParaRPr lang="en-US" sz="1300" dirty="0"/>
           </a:p>
@@ -9436,7 +10153,7 @@
                 <a:ea typeface="Calibri" pitchFamily="34" charset="-122"/>
                 <a:cs typeface="Calibri" pitchFamily="34" charset="-120"/>
               </a:rPr>
-              <a:t>AutoARIMA remains valuable for interpretable, smooth forecasts</a:t>
+              <a:t>AutoARIMA valuable for per-series CI bands without GPU</a:t>
             </a:r>
             <a:endParaRPr lang="en-US" sz="1300" dirty="0"/>
           </a:p>
@@ -9454,7 +10171,7 @@
                 <a:ea typeface="Calibri" pitchFamily="34" charset="-122"/>
                 <a:cs typeface="Calibri" pitchFamily="34" charset="-120"/>
               </a:rPr>
-              <a:t>Both models perform comparably on smaller regional forecasts</a:t>
+              <a:t>MASE, not MAPE, is the trustworthy metric — MAPE explodes near zero-value actuals</a:t>
             </a:r>
             <a:endParaRPr lang="en-US" sz="1300" dirty="0"/>
           </a:p>
@@ -9587,7 +10304,7 @@
                 <a:ea typeface="Calibri" pitchFamily="34" charset="-122"/>
                 <a:cs typeface="Calibri" pitchFamily="34" charset="-120"/>
               </a:rPr>
-              <a:t>Build an interactive forecasting dashboard</a:t>
+              <a:t>Extend dashboard with real-time data ingestion</a:t>
             </a:r>
             <a:endParaRPr lang="en-US" sz="1300" dirty="0"/>
           </a:p>
@@ -9635,6 +10352,10 @@
             <a:prstDash val="solid"/>
           </a:ln>
         </p:spPr>
+        <p:txBody>
+          <a:bodyPr/>
+          <a:p/>
+        </p:txBody>
       </p:sp>
       <p:sp>
         <p:nvSpPr>
@@ -9669,7 +10390,7 @@
                 <a:ea typeface="Calibri" pitchFamily="34" charset="-122"/>
                 <a:cs typeface="Calibri" pitchFamily="34" charset="-120"/>
               </a:rPr>
-              <a:t>View Interactive Dashboard: </a:t>
+              <a:t>Live Streamlit App on Cloud Run: </a:t>
             </a:r>
             <a:pPr algn="l" indent="0" marL="0">
               <a:buNone/>
@@ -9683,7 +10404,7 @@
                 <a:ea typeface="Calibri" pitchFamily="34" charset="-122"/>
                 <a:cs typeface="Calibri" pitchFamily="34" charset="-120"/>
               </a:rPr>
-              <a:t>https://public.tableau.com/app/profile/ella.claude/viz/BikesslaesForecast/Story1</a:t>
+              <a:t>Live App: https://bikes-forecast-6trxjbynbq-uc.a.run.app</a:t>
             </a:r>
             <a:endParaRPr lang="en-US" sz="1200" dirty="0"/>
           </a:p>
@@ -9713,6 +10434,10 @@
             <a:prstDash val="solid"/>
           </a:ln>
         </p:spPr>
+        <p:txBody>
+          <a:bodyPr/>
+          <a:p/>
+        </p:txBody>
       </p:sp>
     </p:spTree>
   </p:cSld>
